--- a/docs/decks/BrokerVerse_Finance_Accounts_Guide.pptx
+++ b/docs/decks/BrokerVerse_Finance_Accounts_Guide.pptx
@@ -3274,7 +3274,7 @@
                 </a:solidFill>
                 <a:latin typeface="Calibri"/>
               </a:rPr>
-              <a:t>BDO Insure (BDOI) insurance broking · Philippines · PHP</a:t>
+              <a:t>BrokerVerse OOTB · insurance broking · Philippines · PHP</a:t>
             </a:r>
           </a:p>
         </p:txBody>
@@ -3821,7 +3821,7 @@
                 </a:solidFill>
                 <a:latin typeface="Calibri"/>
               </a:rPr>
-              <a:t>Home (business overview dashboard)</a:t>
+              <a:t>Executive Dashboard</a:t>
             </a:r>
           </a:p>
         </p:txBody>
@@ -4188,7 +4188,7 @@
                 </a:solidFill>
                 <a:latin typeface="Calibri"/>
               </a:rPr>
-              <a:t>Screen from the recorded end-to-end run — Remittance approval queue — fe.approver</a:t>
+              <a:t>Live screen — Remittance approval queue — signed in as fe.approver</a:t>
             </a:r>
           </a:p>
         </p:txBody>
@@ -4606,7 +4606,7 @@
                 </a:solidFill>
                 <a:latin typeface="Calibri"/>
               </a:rPr>
-              <a:t>Agents / referrer accounts</a:t>
+              <a:t>Incentives</a:t>
             </a:r>
           </a:p>
         </p:txBody>
@@ -4714,7 +4714,7 @@
                 </a:solidFill>
                 <a:latin typeface="Calibri"/>
               </a:rPr>
-              <a:t>Live screen — Commission &gt; Agents/Referrer Accounts — signed in as liza.finance</a:t>
+              <a:t>Live screen — Accounts &gt; Incentive &gt; Calculations — signed in as liza.finance</a:t>
             </a:r>
           </a:p>
         </p:txBody>
@@ -4795,7 +4795,7 @@
                 </a:solidFill>
                 <a:latin typeface="Calibri"/>
               </a:rPr>
-              <a:t>Commission &gt; Agents/Referrer Accounts</a:t>
+              <a:t>Accounts &gt; Incentive &gt; Calculations</a:t>
             </a:r>
           </a:p>
         </p:txBody>
@@ -4837,7 +4837,7 @@
                 </a:solidFill>
                 <a:latin typeface="Calibri"/>
               </a:rPr>
-              <a:t>Purpose:  </a:t>
+              <a:t>Maker:  </a:t>
             </a:r>
             <a:r>
               <a:rPr sz="1500">
@@ -4846,7 +4846,7 @@
                 </a:solidFill>
                 <a:latin typeface="Calibri"/>
               </a:rPr>
-              <a:t>referrers with type, level, policies, net payable, WHT type and bank account.</a:t>
+              <a:t>New Calculation for a programme and period creates a batch CALC- per agent.</a:t>
             </a:r>
           </a:p>
           <a:p>
@@ -4867,7 +4867,7 @@
                 </a:solidFill>
                 <a:latin typeface="Calibri"/>
               </a:rPr>
-              <a:t>Rule:  </a:t>
+              <a:t>Checker:  </a:t>
             </a:r>
             <a:r>
               <a:rPr sz="1500">
@@ -4876,7 +4876,7 @@
                 </a:solidFill>
                 <a:latin typeface="Calibri"/>
               </a:rPr>
-              <a:t>WHT rate follows the referrer type (Individual 5%).</a:t>
+              <a:t>a second finance user approves or rejects the batch in Approvals.</a:t>
             </a:r>
           </a:p>
           <a:p>
@@ -4897,7 +4897,7 @@
                 </a:solidFill>
                 <a:latin typeface="Calibri"/>
               </a:rPr>
-              <a:t>Next:  </a:t>
+              <a:t>Statement:  </a:t>
             </a:r>
             <a:r>
               <a:rPr sz="1500">
@@ -4906,7 +4906,37 @@
                 </a:solidFill>
                 <a:latin typeface="Calibri"/>
               </a:rPr>
-              <a:t>Generate payout creates a draft disbursement.</a:t>
+              <a:t>choose the agent to see earnings, year-to-date and the programme breakdown.</a:t>
+            </a:r>
+          </a:p>
+          <a:p>
+            <a:pPr marL="201168" indent="-182880">
+              <a:spcAft>
+                <a:spcPts val="1000"/>
+              </a:spcAft>
+              <a:buClr>
+                <a:srgbClr val="1E88E5"/>
+              </a:buClr>
+              <a:buFont typeface="Arial"/>
+              <a:buChar char="•"/>
+            </a:pPr>
+            <a:r>
+              <a:rPr b="1" sz="1500">
+                <a:solidFill>
+                  <a:srgbClr val="0B4F9C"/>
+                </a:solidFill>
+                <a:latin typeface="Calibri"/>
+              </a:rPr>
+              <a:t>Rule:  </a:t>
+            </a:r>
+            <a:r>
+              <a:rPr sz="1500">
+                <a:solidFill>
+                  <a:srgbClr val="1F2937"/>
+                </a:solidFill>
+                <a:latin typeface="Calibri"/>
+              </a:rPr>
+              <a:t>programmes are master data kept by administrators.</a:t>
             </a:r>
           </a:p>
         </p:txBody>
@@ -7739,7 +7769,7 @@
                 </a:solidFill>
                 <a:latin typeface="Calibri"/>
               </a:rPr>
-              <a:t>REPORTS &gt; OPERATIONAL / FINANCIAL</a:t>
+              <a:t>REPORTS &gt; ALL REPORTS</a:t>
             </a:r>
           </a:p>
         </p:txBody>
@@ -8233,7 +8263,7 @@
                 </a:solidFill>
                 <a:latin typeface="Calibri"/>
               </a:rPr>
-              <a:t>Thirteen reports in your catalogue.</a:t>
+              <a:t>Fourteen reports in Reports &gt; All Reports.</a:t>
             </a:r>
           </a:p>
         </p:txBody>
@@ -8550,7 +8580,7 @@
         </p:nvGraphicFramePr>
         <p:xfrm>
           <a:off x="6190488" y="1783080"/>
-          <a:ext cx="5541262" cy="3291840"/>
+          <a:ext cx="5541262" cy="3657600"/>
         </p:xfrm>
         <a:graphic>
           <a:graphicData uri="http://schemas.openxmlformats.org/drawingml/2006/table">
@@ -8759,7 +8789,7 @@
                           </a:solidFill>
                           <a:latin typeface="Calibri"/>
                         </a:rPr>
-                        <a:t>Receipts Register</a:t>
+                        <a:t>Commission Receivable – Direct Bill</a:t>
                       </a:r>
                     </a:p>
                   </a:txBody>
@@ -8781,7 +8811,7 @@
                           </a:solidFill>
                           <a:latin typeface="Calibri"/>
                         </a:rPr>
-                        <a:t>Official receipts: bill, policy, payment mode, bank, reference</a:t>
+                        <a:t>Commission and VAT due from insurers on direct-bill policies, with ageing</a:t>
                       </a:r>
                     </a:p>
                   </a:txBody>
@@ -8805,7 +8835,7 @@
                           </a:solidFill>
                           <a:latin typeface="Calibri"/>
                         </a:rPr>
-                        <a:t>Payables / Disbursement Register</a:t>
+                        <a:t>Receipts Register</a:t>
                       </a:r>
                     </a:p>
                   </a:txBody>
@@ -8827,7 +8857,7 @@
                           </a:solidFill>
                           <a:latin typeface="Calibri"/>
                         </a:rPr>
-                        <a:t>Payment vouchers to insurers, agents, clients, vendors with approval and paid dates</a:t>
+                        <a:t>Official receipts: bill, policy, payment mode, bank, reference</a:t>
                       </a:r>
                     </a:p>
                   </a:txBody>
@@ -8851,7 +8881,7 @@
                           </a:solidFill>
                           <a:latin typeface="Calibri"/>
                         </a:rPr>
-                        <a:t>Journal Register</a:t>
+                        <a:t>Payables / Disbursement Register</a:t>
                       </a:r>
                     </a:p>
                   </a:txBody>
@@ -8873,7 +8903,7 @@
                           </a:solidFill>
                           <a:latin typeface="Calibri"/>
                         </a:rPr>
-                        <a:t>Journal lines: account, debit, credit, memo</a:t>
+                        <a:t>Payment vouchers to insurers, agents, clients, vendors with approval and paid dates</a:t>
                       </a:r>
                     </a:p>
                   </a:txBody>
@@ -8897,7 +8927,7 @@
                           </a:solidFill>
                           <a:latin typeface="Calibri"/>
                         </a:rPr>
-                        <a:t>Trial Balance</a:t>
+                        <a:t>Journal Register</a:t>
                       </a:r>
                     </a:p>
                   </a:txBody>
@@ -8919,7 +8949,7 @@
                           </a:solidFill>
                           <a:latin typeface="Calibri"/>
                         </a:rPr>
-                        <a:t>Opening, period debits and credits, closing balance per account (approved and posted JVs)</a:t>
+                        <a:t>Journal lines: account, debit, credit, memo</a:t>
                       </a:r>
                     </a:p>
                   </a:txBody>
@@ -8943,7 +8973,7 @@
                           </a:solidFill>
                           <a:latin typeface="Calibri"/>
                         </a:rPr>
-                        <a:t>Incentive Results</a:t>
+                        <a:t>Trial Balance</a:t>
                       </a:r>
                     </a:p>
                   </a:txBody>
@@ -8965,13 +8995,59 @@
                           </a:solidFill>
                           <a:latin typeface="Calibri"/>
                         </a:rPr>
+                        <a:t>Opening, period debits and credits, closing balance per account (approved and posted JVs)</a:t>
+                      </a:r>
+                    </a:p>
+                  </a:txBody>
+                  <a:tcPr marL="73152" marR="73152" marT="27432" marB="27432" anchor="ctr">
+                    <a:solidFill>
+                      <a:srgbClr val="FFFFFF"/>
+                    </a:solidFill>
+                  </a:tcPr>
+                </a:tc>
+              </a:tr>
+              <a:tr h="365760">
+                <a:tc>
+                  <a:txBody>
+                    <a:bodyPr wrap="square"/>
+                    <a:lstStyle/>
+                    <a:p>
+                      <a:r>
+                        <a:rPr sz="950" b="1">
+                          <a:solidFill>
+                            <a:srgbClr val="0B4F9C"/>
+                          </a:solidFill>
+                          <a:latin typeface="Calibri"/>
+                        </a:rPr>
+                        <a:t>Incentive Results</a:t>
+                      </a:r>
+                    </a:p>
+                  </a:txBody>
+                  <a:tcPr marL="73152" marR="73152" marT="27432" marB="27432" anchor="ctr">
+                    <a:solidFill>
+                      <a:srgbClr val="F5F8FC"/>
+                    </a:solidFill>
+                  </a:tcPr>
+                </a:tc>
+                <a:tc>
+                  <a:txBody>
+                    <a:bodyPr wrap="square"/>
+                    <a:lstStyle/>
+                    <a:p>
+                      <a:r>
+                        <a:rPr sz="950">
+                          <a:solidFill>
+                            <a:srgbClr val="1F2937"/>
+                          </a:solidFill>
+                          <a:latin typeface="Calibri"/>
+                        </a:rPr>
                         <a:t>Programme target, achieved, achievement % and payout per agent</a:t>
                       </a:r>
                     </a:p>
                   </a:txBody>
                   <a:tcPr marL="73152" marR="73152" marT="27432" marB="27432" anchor="ctr">
                     <a:solidFill>
-                      <a:srgbClr val="FFFFFF"/>
+                      <a:srgbClr val="F5F8FC"/>
                     </a:solidFill>
                   </a:tcPr>
                 </a:tc>
@@ -10827,7 +10903,7 @@
                 </a:solidFill>
                 <a:latin typeface="Calibri"/>
               </a:rPr>
-              <a:t>Petty cash request</a:t>
+              <a:t>Petty cash request / incentive batch</a:t>
             </a:r>
           </a:p>
         </p:txBody>
@@ -10860,7 +10936,7 @@
                 </a:solidFill>
                 <a:latin typeface="Calibri"/>
               </a:rPr>
-              <a:t>Requester and amount.</a:t>
+              <a:t>Requester and amount, e.g. ₱85,000.00.</a:t>
             </a:r>
           </a:p>
         </p:txBody>
@@ -11402,7 +11478,7 @@
                 </a:solidFill>
                 <a:latin typeface="Calibri"/>
               </a:rPr>
-              <a:t>Chart of accounts has no operating-expense accounts yet (rent, salaries, utilities).</a:t>
+              <a:t>Your session is kept in the browser’s local storage: sign out on shared computers and keep the browser up to date.</a:t>
             </a:r>
           </a:p>
           <a:p>
@@ -11423,7 +11499,7 @@
                 </a:solidFill>
                 <a:latin typeface="Calibri"/>
               </a:rPr>
-              <a:t>Receipts API is shared with the in-app payment step; separation is planned.</a:t>
+              <a:t>Two-factor set-up shows a setup key and an app link, but no QR code: type the key into the authenticator app.</a:t>
             </a:r>
           </a:p>
           <a:p>
@@ -11444,7 +11520,7 @@
                 </a:solidFill>
                 <a:latin typeface="Calibri"/>
               </a:rPr>
-              <a:t>Direct Bill Processing wording (insured bill vs insurer remittance) awaits a business decision.</a:t>
+              <a:t>Screens are in English or Thai; Filipino is configured but has no translation yet.</a:t>
             </a:r>
           </a:p>
           <a:p>
@@ -11465,28 +11541,7 @@
                 </a:solidFill>
                 <a:latin typeface="Calibri"/>
               </a:rPr>
-              <a:t>Remittance and settlement dates are shown month-first; the settlement date picker is MM/DD/YYYY.</a:t>
-            </a:r>
-          </a:p>
-          <a:p>
-            <a:pPr marL="201168" indent="-182880">
-              <a:spcAft>
-                <a:spcPts val="800"/>
-              </a:spcAft>
-              <a:buClr>
-                <a:srgbClr val="5B6778"/>
-              </a:buClr>
-              <a:buFont typeface="Arial"/>
-              <a:buChar char="•"/>
-            </a:pPr>
-            <a:r>
-              <a:rPr sz="1500">
-                <a:solidFill>
-                  <a:srgbClr val="1F2937"/>
-                </a:solidFill>
-                <a:latin typeface="Calibri"/>
-              </a:rPr>
-              <a:t>Commission can accrue to an administrator who issued a policy.</a:t>
+              <a:t>Some database queries use the database’s own date: set the PostgreSQL time zone to Asia/Manila.</a:t>
             </a:r>
           </a:p>
         </p:txBody>
@@ -11977,7 +12032,7 @@
                 </a:solidFill>
                 <a:latin typeface="Calibri"/>
               </a:rPr>
-              <a:t>&lt;to be confirmed by BDOI&gt;</a:t>
+              <a:t>&lt;service desk to be confirmed&gt;</a:t>
             </a:r>
           </a:p>
         </p:txBody>
@@ -12647,6 +12702,36 @@
                 </a:solidFill>
                 <a:latin typeface="Calibri"/>
               </a:rPr>
+              <a:t>Runs incentives:  </a:t>
+            </a:r>
+            <a:r>
+              <a:rPr sz="1600">
+                <a:solidFill>
+                  <a:srgbClr val="1F2937"/>
+                </a:solidFill>
+                <a:latin typeface="Calibri"/>
+              </a:rPr>
+              <a:t>calculates, approves (second user) and pays agent incentives; reconciles reinsurer statements.</a:t>
+            </a:r>
+          </a:p>
+          <a:p>
+            <a:pPr marL="201168" indent="-182880">
+              <a:spcAft>
+                <a:spcPts val="1200"/>
+              </a:spcAft>
+              <a:buClr>
+                <a:srgbClr val="1E88E5"/>
+              </a:buClr>
+              <a:buFont typeface="Arial"/>
+              <a:buChar char="•"/>
+            </a:pPr>
+            <a:r>
+              <a:rPr b="1" sz="1600">
+                <a:solidFill>
+                  <a:srgbClr val="0B4F9C"/>
+                </a:solidFill>
+                <a:latin typeface="Calibri"/>
+              </a:rPr>
               <a:t>Reports:  </a:t>
             </a:r>
             <a:r>
@@ -12656,7 +12741,7 @@
                 </a:solidFill>
                 <a:latin typeface="Calibri"/>
               </a:rPr>
-              <a:t>financial and operational reports; receivables and payables registers.</a:t>
+              <a:t>financial reports and the remittance / commission reports.</a:t>
             </a:r>
           </a:p>
         </p:txBody>
@@ -12770,7 +12855,7 @@
                 </a:solidFill>
                 <a:latin typeface="Calibri"/>
               </a:rPr>
-              <a:t>User names liza.finance and fe.approver. Land on Home, the business overview dashboard.</a:t>
+              <a:t>User names liza.finance and fe.approver. Land on the Executive Dashboard.</a:t>
             </a:r>
           </a:p>
         </p:txBody>
@@ -12884,7 +12969,7 @@
                 </a:solidFill>
                 <a:latin typeface="Calibri"/>
               </a:rPr>
-              <a:t>fe.approver (checker for vouchers, remittances, settlements, JVs), insurers (remittance), agents (payouts).</a:t>
+              <a:t>fe.approver (checker for vouchers, remittances, settlements, JVs, debit notes, incentive batches), insurers (remittance), agents (payouts).</a:t>
             </a:r>
           </a:p>
         </p:txBody>
@@ -13271,7 +13356,7 @@
         <p:spPr>
           <a:xfrm>
             <a:off x="457200" y="1645920"/>
-            <a:ext cx="3636264" cy="2839085"/>
+            <a:ext cx="3636264" cy="2462276"/>
           </a:xfrm>
           <a:prstGeom prst="roundRect">
             <a:avLst>
@@ -13378,7 +13463,7 @@
           <a:p>
             <a:pPr algn="l"/>
             <a:r>
-              <a:rPr sz="1600" b="1" i="0">
+              <a:rPr sz="1500" b="1" i="0">
                 <a:solidFill>
                   <a:srgbClr val="FFFFFF"/>
                 </a:solidFill>
@@ -13398,7 +13483,7 @@
         <p:spPr>
           <a:xfrm>
             <a:off x="566928" y="2121408"/>
-            <a:ext cx="3435095" cy="2290445"/>
+            <a:ext cx="3435095" cy="1913635"/>
           </a:xfrm>
           <a:prstGeom prst="rect">
             <a:avLst/>
@@ -13420,7 +13505,7 @@
               <a:buChar char="•"/>
             </a:pPr>
             <a:r>
-              <a:rPr sz="1500">
+              <a:rPr sz="1400">
                 <a:solidFill>
                   <a:srgbClr val="1F2937"/>
                 </a:solidFill>
@@ -13440,7 +13525,7 @@
         <p:spPr>
           <a:xfrm>
             <a:off x="4276344" y="1645920"/>
-            <a:ext cx="3636264" cy="2839085"/>
+            <a:ext cx="3636264" cy="2462276"/>
           </a:xfrm>
           <a:prstGeom prst="roundRect">
             <a:avLst>
@@ -13547,7 +13632,7 @@
           <a:p>
             <a:pPr algn="l"/>
             <a:r>
-              <a:rPr sz="1600" b="1" i="0">
+              <a:rPr sz="1500" b="1" i="0">
                 <a:solidFill>
                   <a:srgbClr val="FFFFFF"/>
                 </a:solidFill>
@@ -13567,7 +13652,7 @@
         <p:spPr>
           <a:xfrm>
             <a:off x="4386072" y="2121408"/>
-            <a:ext cx="3435095" cy="2290445"/>
+            <a:ext cx="3435095" cy="1913635"/>
           </a:xfrm>
           <a:prstGeom prst="rect">
             <a:avLst/>
@@ -13589,7 +13674,7 @@
               <a:buChar char="•"/>
             </a:pPr>
             <a:r>
-              <a:rPr sz="1500">
+              <a:rPr sz="1400">
                 <a:solidFill>
                   <a:srgbClr val="1F2937"/>
                 </a:solidFill>
@@ -13610,7 +13695,7 @@
               <a:buChar char="•"/>
             </a:pPr>
             <a:r>
-              <a:rPr sz="1500">
+              <a:rPr sz="1400">
                 <a:solidFill>
                   <a:srgbClr val="1F2937"/>
                 </a:solidFill>
@@ -13630,7 +13715,7 @@
         <p:spPr>
           <a:xfrm>
             <a:off x="8095488" y="1645920"/>
-            <a:ext cx="3636264" cy="2839085"/>
+            <a:ext cx="3636264" cy="2462276"/>
           </a:xfrm>
           <a:prstGeom prst="roundRect">
             <a:avLst>
@@ -13737,7 +13822,7 @@
           <a:p>
             <a:pPr algn="l"/>
             <a:r>
-              <a:rPr sz="1600" b="1" i="0">
+              <a:rPr sz="1500" b="1" i="0">
                 <a:solidFill>
                   <a:srgbClr val="FFFFFF"/>
                 </a:solidFill>
@@ -13757,7 +13842,7 @@
         <p:spPr>
           <a:xfrm>
             <a:off x="8205215" y="2121408"/>
-            <a:ext cx="3435095" cy="2290445"/>
+            <a:ext cx="3435095" cy="1913635"/>
           </a:xfrm>
           <a:prstGeom prst="rect">
             <a:avLst/>
@@ -13779,7 +13864,7 @@
               <a:buChar char="•"/>
             </a:pPr>
             <a:r>
-              <a:rPr sz="1500">
+              <a:rPr sz="1400">
                 <a:solidFill>
                   <a:srgbClr val="1F2937"/>
                 </a:solidFill>
@@ -13800,7 +13885,7 @@
               <a:buChar char="•"/>
             </a:pPr>
             <a:r>
-              <a:rPr sz="1500">
+              <a:rPr sz="1400">
                 <a:solidFill>
                   <a:srgbClr val="1F2937"/>
                 </a:solidFill>
@@ -13821,7 +13906,7 @@
               <a:buChar char="•"/>
             </a:pPr>
             <a:r>
-              <a:rPr sz="1500">
+              <a:rPr sz="1400">
                 <a:solidFill>
                   <a:srgbClr val="1F2937"/>
                 </a:solidFill>
@@ -13842,7 +13927,7 @@
               <a:buChar char="•"/>
             </a:pPr>
             <a:r>
-              <a:rPr sz="1500">
+              <a:rPr sz="1400">
                 <a:solidFill>
                   <a:srgbClr val="1F2937"/>
                 </a:solidFill>
@@ -13863,7 +13948,7 @@
               <a:buChar char="•"/>
             </a:pPr>
             <a:r>
-              <a:rPr sz="1500">
+              <a:rPr sz="1400">
                 <a:solidFill>
                   <a:srgbClr val="1F2937"/>
                 </a:solidFill>
@@ -13884,7 +13969,7 @@
               <a:buChar char="•"/>
             </a:pPr>
             <a:r>
-              <a:rPr sz="1500">
+              <a:rPr sz="1400">
                 <a:solidFill>
                   <a:srgbClr val="1F2937"/>
                 </a:solidFill>
@@ -13905,7 +13990,7 @@
               <a:buChar char="•"/>
             </a:pPr>
             <a:r>
-              <a:rPr sz="1500">
+              <a:rPr sz="1400">
                 <a:solidFill>
                   <a:srgbClr val="1F2937"/>
                 </a:solidFill>
@@ -13924,8 +14009,8 @@
         </p:nvSpPr>
         <p:spPr>
           <a:xfrm>
-            <a:off x="457200" y="4667885"/>
-            <a:ext cx="3636264" cy="1550034"/>
+            <a:off x="457200" y="4291076"/>
+            <a:ext cx="3636264" cy="1926843"/>
           </a:xfrm>
           <a:prstGeom prst="roundRect">
             <a:avLst>
@@ -13972,7 +14057,7 @@
         </p:nvSpPr>
         <p:spPr>
           <a:xfrm>
-            <a:off x="457200" y="4667885"/>
+            <a:off x="457200" y="4291076"/>
             <a:ext cx="3636264" cy="384048"/>
           </a:xfrm>
           <a:prstGeom prst="roundRect">
@@ -14018,7 +14103,7 @@
         </p:nvSpPr>
         <p:spPr>
           <a:xfrm>
-            <a:off x="594360" y="4667885"/>
+            <a:off x="594360" y="4291076"/>
             <a:ext cx="3361944" cy="384048"/>
           </a:xfrm>
           <a:prstGeom prst="rect">
@@ -14032,7 +14117,7 @@
           <a:p>
             <a:pPr algn="l"/>
             <a:r>
-              <a:rPr sz="1600" b="1" i="0">
+              <a:rPr sz="1500" b="1" i="0">
                 <a:solidFill>
                   <a:srgbClr val="FFFFFF"/>
                 </a:solidFill>
@@ -14051,8 +14136,8 @@
         </p:nvSpPr>
         <p:spPr>
           <a:xfrm>
-            <a:off x="566928" y="5143373"/>
-            <a:ext cx="3435095" cy="1001394"/>
+            <a:off x="566928" y="4766564"/>
+            <a:ext cx="3435095" cy="1378203"/>
           </a:xfrm>
           <a:prstGeom prst="rect">
             <a:avLst/>
@@ -14074,7 +14159,7 @@
               <a:buChar char="•"/>
             </a:pPr>
             <a:r>
-              <a:rPr sz="1500">
+              <a:rPr sz="1400">
                 <a:solidFill>
                   <a:srgbClr val="1F2937"/>
                 </a:solidFill>
@@ -14095,7 +14180,7 @@
               <a:buChar char="•"/>
             </a:pPr>
             <a:r>
-              <a:rPr sz="1500">
+              <a:rPr sz="1400">
                 <a:solidFill>
                   <a:srgbClr val="1F2937"/>
                 </a:solidFill>
@@ -14114,8 +14199,8 @@
         </p:nvSpPr>
         <p:spPr>
           <a:xfrm>
-            <a:off x="4276344" y="4667885"/>
-            <a:ext cx="3636264" cy="1550034"/>
+            <a:off x="4276344" y="4291076"/>
+            <a:ext cx="3636264" cy="1926843"/>
           </a:xfrm>
           <a:prstGeom prst="roundRect">
             <a:avLst>
@@ -14162,7 +14247,7 @@
         </p:nvSpPr>
         <p:spPr>
           <a:xfrm>
-            <a:off x="4276344" y="4667885"/>
+            <a:off x="4276344" y="4291076"/>
             <a:ext cx="3636264" cy="384048"/>
           </a:xfrm>
           <a:prstGeom prst="roundRect">
@@ -14208,7 +14293,7 @@
         </p:nvSpPr>
         <p:spPr>
           <a:xfrm>
-            <a:off x="4413504" y="4667885"/>
+            <a:off x="4413504" y="4291076"/>
             <a:ext cx="3361944" cy="384048"/>
           </a:xfrm>
           <a:prstGeom prst="rect">
@@ -14222,7 +14307,7 @@
           <a:p>
             <a:pPr algn="l"/>
             <a:r>
-              <a:rPr sz="1600" b="1" i="0">
+              <a:rPr sz="1500" b="1" i="0">
                 <a:solidFill>
                   <a:srgbClr val="FFFFFF"/>
                 </a:solidFill>
@@ -14241,8 +14326,8 @@
         </p:nvSpPr>
         <p:spPr>
           <a:xfrm>
-            <a:off x="4386072" y="5143373"/>
-            <a:ext cx="3435095" cy="1001394"/>
+            <a:off x="4386072" y="4766564"/>
+            <a:ext cx="3435095" cy="1378203"/>
           </a:xfrm>
           <a:prstGeom prst="rect">
             <a:avLst/>
@@ -14264,7 +14349,7 @@
               <a:buChar char="•"/>
             </a:pPr>
             <a:r>
-              <a:rPr sz="1500">
+              <a:rPr sz="1400">
                 <a:solidFill>
                   <a:srgbClr val="1F2937"/>
                 </a:solidFill>
@@ -14283,8 +14368,8 @@
         </p:nvSpPr>
         <p:spPr>
           <a:xfrm>
-            <a:off x="8095488" y="4667885"/>
-            <a:ext cx="3636264" cy="1550034"/>
+            <a:off x="8095488" y="4291076"/>
+            <a:ext cx="3636264" cy="1926843"/>
           </a:xfrm>
           <a:prstGeom prst="roundRect">
             <a:avLst>
@@ -14331,7 +14416,7 @@
         </p:nvSpPr>
         <p:spPr>
           <a:xfrm>
-            <a:off x="8095488" y="4667885"/>
+            <a:off x="8095488" y="4291076"/>
             <a:ext cx="3636264" cy="384048"/>
           </a:xfrm>
           <a:prstGeom prst="roundRect">
@@ -14377,7 +14462,7 @@
         </p:nvSpPr>
         <p:spPr>
           <a:xfrm>
-            <a:off x="8232648" y="4667885"/>
+            <a:off x="8232648" y="4291076"/>
             <a:ext cx="3361944" cy="384048"/>
           </a:xfrm>
           <a:prstGeom prst="rect">
@@ -14391,7 +14476,7 @@
           <a:p>
             <a:pPr algn="l"/>
             <a:r>
-              <a:rPr sz="1600" b="1" i="0">
+              <a:rPr sz="1500" b="1" i="0">
                 <a:solidFill>
                   <a:srgbClr val="FFFFFF"/>
                 </a:solidFill>
@@ -14410,8 +14495,8 @@
         </p:nvSpPr>
         <p:spPr>
           <a:xfrm>
-            <a:off x="8205215" y="5143373"/>
-            <a:ext cx="3435095" cy="1001394"/>
+            <a:off x="8205215" y="4766564"/>
+            <a:ext cx="3435095" cy="1378203"/>
           </a:xfrm>
           <a:prstGeom prst="rect">
             <a:avLst/>
@@ -14433,13 +14518,13 @@
               <a:buChar char="•"/>
             </a:pPr>
             <a:r>
-              <a:rPr sz="1500">
+              <a:rPr sz="1400">
                 <a:solidFill>
                   <a:srgbClr val="1F2937"/>
                 </a:solidFill>
                 <a:latin typeface="Calibri"/>
               </a:rPr>
-              <a:t>Financial: SOA, Collection, Payables, Journal, Trial Balance</a:t>
+              <a:t>All Reports (14 reports)</a:t>
             </a:r>
           </a:p>
           <a:p>
@@ -14454,13 +14539,34 @@
               <a:buChar char="•"/>
             </a:pPr>
             <a:r>
-              <a:rPr sz="1500">
+              <a:rPr sz="1400">
                 <a:solidFill>
                   <a:srgbClr val="1F2937"/>
                 </a:solidFill>
                 <a:latin typeface="Calibri"/>
               </a:rPr>
-              <a:t>Operational: all five</a:t>
+              <a:t>Financial Reports: SOA, Collection, Payables, Journal, Trial Balance</a:t>
+            </a:r>
+          </a:p>
+          <a:p>
+            <a:pPr marL="201168" indent="-182880">
+              <a:spcAft>
+                <a:spcPts val="200"/>
+              </a:spcAft>
+              <a:buClr>
+                <a:srgbClr val="1E88E5"/>
+              </a:buClr>
+              <a:buFont typeface="Arial"/>
+              <a:buChar char="•"/>
+            </a:pPr>
+            <a:r>
+              <a:rPr sz="1400">
+                <a:solidFill>
+                  <a:srgbClr val="1F2937"/>
+                </a:solidFill>
+                <a:latin typeface="Calibri"/>
+              </a:rPr>
+              <a:t>Operational Reports: Remittance, Broker Commission</a:t>
             </a:r>
           </a:p>
         </p:txBody>
@@ -15226,7 +15332,7 @@
         <p:spPr>
           <a:xfrm>
             <a:off x="420624" y="1243584"/>
-            <a:ext cx="7315200" cy="4599432"/>
+            <a:ext cx="5641510" cy="4599432"/>
           </a:xfrm>
           <a:prstGeom prst="rect">
             <a:avLst/>
@@ -15280,7 +15386,7 @@
         <p:spPr>
           <a:xfrm>
             <a:off x="457200" y="1280160"/>
-            <a:ext cx="7242048" cy="4526280"/>
+            <a:ext cx="5568358" cy="4526280"/>
           </a:xfrm>
           <a:prstGeom prst="rect">
             <a:avLst/>
@@ -15320,7 +15426,7 @@
                 </a:solidFill>
                 <a:latin typeface="Calibri"/>
               </a:rPr>
-              <a:t>Screen from the recorded end-to-end run — Add receipt: open bills for POL-2026-00001 — liza.finance</a:t>
+              <a:t>Live screen — Add receipt with the open bill of POL-2026-90003 (example values) — signed in as liza.finance</a:t>
             </a:r>
           </a:p>
         </p:txBody>
@@ -15401,7 +15507,7 @@
                 </a:solidFill>
                 <a:latin typeface="Calibri"/>
               </a:rPr>
-              <a:t>Accounts &gt; Receipts &gt; Add</a:t>
+              <a:t>Accounts &gt; Receipts &gt; + Receipt</a:t>
             </a:r>
           </a:p>
         </p:txBody>
@@ -16038,7 +16144,7 @@
                 </a:solidFill>
                 <a:latin typeface="Calibri"/>
               </a:rPr>
-              <a:t>Manual Trigger Reminder Now, or the 08:00 job.</a:t>
+              <a:t>Send Payment Reminders Now, or the 08:00 job.</a:t>
             </a:r>
           </a:p>
           <a:p>
@@ -16402,7 +16508,7 @@
                 </a:solidFill>
                 <a:latin typeface="Calibri"/>
               </a:rPr>
-              <a:t>Screen from the recorded end-to-end run — Agent payout invoice list (PV-2026-00022) — liza.finance</a:t>
+              <a:t>Live screen — Referrer account of Ramon Dela Cruz — signed in as liza.finance</a:t>
             </a:r>
           </a:p>
         </p:txBody>
@@ -16483,7 +16589,7 @@
                 </a:solidFill>
                 <a:latin typeface="Calibri"/>
               </a:rPr>
-              <a:t>Accounts &gt; Disbursement &gt; payout</a:t>
+              <a:t>Commission &gt; Agents/Referrer Accounts &gt; referrer</a:t>
             </a:r>
           </a:p>
         </p:txBody>
